--- a/relatorios/Painel_Executivo_Resumo_2026-08-03.pptx
+++ b/relatorios/Painel_Executivo_Resumo_2026-08-03.pptx
@@ -398,7 +398,6 @@
         </c:dLbls>
         <c:axId val="2094734554"/>
         <c:axId val="2094734552"/>
-        <c:axId val="2094734556"/>
       </c:areaChart>
       <c:catAx>
         <c:axId val="2094734554"/>
@@ -647,7 +646,6 @@
         <c:overlap val="0"/>
         <c:axId val="2094734554"/>
         <c:axId val="2094734552"/>
-        <c:axId val="2094734556"/>
       </c:barChart>
       <c:catAx>
         <c:axId val="2094734554"/>
